--- a/Visuals (1).pptx
+++ b/Visuals (1).pptx
@@ -5,23 +5,24 @@
     <p:sldMasterId id="2147483648" r:id="rId1"/>
   </p:sldMasterIdLst>
   <p:notesMasterIdLst>
-    <p:notesMasterId r:id="rId16"/>
+    <p:notesMasterId r:id="rId17"/>
   </p:notesMasterIdLst>
   <p:sldIdLst>
     <p:sldId id="256" r:id="rId2"/>
     <p:sldId id="257" r:id="rId3"/>
     <p:sldId id="258" r:id="rId4"/>
     <p:sldId id="259" r:id="rId5"/>
-    <p:sldId id="260" r:id="rId6"/>
-    <p:sldId id="261" r:id="rId7"/>
-    <p:sldId id="262" r:id="rId8"/>
-    <p:sldId id="263" r:id="rId9"/>
-    <p:sldId id="264" r:id="rId10"/>
-    <p:sldId id="265" r:id="rId11"/>
-    <p:sldId id="266" r:id="rId12"/>
-    <p:sldId id="267" r:id="rId13"/>
-    <p:sldId id="268" r:id="rId14"/>
-    <p:sldId id="269" r:id="rId15"/>
+    <p:sldId id="270" r:id="rId6"/>
+    <p:sldId id="260" r:id="rId7"/>
+    <p:sldId id="261" r:id="rId8"/>
+    <p:sldId id="262" r:id="rId9"/>
+    <p:sldId id="263" r:id="rId10"/>
+    <p:sldId id="264" r:id="rId11"/>
+    <p:sldId id="265" r:id="rId12"/>
+    <p:sldId id="266" r:id="rId13"/>
+    <p:sldId id="267" r:id="rId14"/>
+    <p:sldId id="268" r:id="rId15"/>
+    <p:sldId id="269" r:id="rId16"/>
   </p:sldIdLst>
   <p:sldSz cx="9144000" cy="5143500" type="screen16x9"/>
   <p:notesSz cx="5143500" cy="9144000"/>
@@ -461,7 +462,7 @@
               </a:defRPr>
             </a:pPr>
             <a:r>
-              <a:rPr sz="1000" b="0" i="0" u="none" strike="noStrike">
+              <a:rPr lang="en-US" sz="1000" b="0" i="0" u="none" strike="noStrike">
                 <a:solidFill>
                   <a:srgbClr val="64748B"/>
                 </a:solidFill>
@@ -963,7 +964,7 @@
               </a:defRPr>
             </a:pPr>
             <a:r>
-              <a:rPr sz="1000" b="0" i="0" u="none" strike="noStrike">
+              <a:rPr lang="en-US" sz="1000" b="0" i="0" u="none" strike="noStrike">
                 <a:solidFill>
                   <a:srgbClr val="64748B"/>
                 </a:solidFill>
@@ -3682,7 +3683,7 @@
               </a:defRPr>
             </a:pPr>
             <a:r>
-              <a:rPr sz="1000" b="0" i="0" u="none" strike="noStrike">
+              <a:rPr lang="en-US" sz="1000" b="0" i="0" u="none" strike="noStrike">
                 <a:solidFill>
                   <a:srgbClr val="64748B"/>
                 </a:solidFill>
@@ -3984,7 +3985,7 @@
               </a:defRPr>
             </a:pPr>
             <a:r>
-              <a:rPr sz="1000" b="0" i="0" u="none" strike="noStrike">
+              <a:rPr lang="en-US" sz="1000" b="0" i="0" u="none" strike="noStrike">
                 <a:solidFill>
                   <a:srgbClr val="64748B"/>
                 </a:solidFill>
@@ -4450,7 +4451,7 @@
               </a:defRPr>
             </a:pPr>
             <a:r>
-              <a:rPr sz="1000" b="0" i="0" u="none" strike="noStrike">
+              <a:rPr lang="en-US" sz="1000" b="0" i="0" u="none" strike="noStrike">
                 <a:solidFill>
                   <a:srgbClr val="64748B"/>
                 </a:solidFill>
@@ -4919,7 +4920,7 @@
               </a:defRPr>
             </a:pPr>
             <a:r>
-              <a:rPr sz="1000" b="0" i="0" u="none" strike="noStrike">
+              <a:rPr lang="en-US" sz="1000" b="0" i="0" u="none" strike="noStrike">
                 <a:solidFill>
                   <a:srgbClr val="64748B"/>
                 </a:solidFill>
@@ -5256,7 +5257,7 @@
               </a:defRPr>
             </a:pPr>
             <a:r>
-              <a:rPr sz="1000" b="0" i="0" u="none" strike="noStrike">
+              <a:rPr lang="en-US" sz="1000" b="0" i="0" u="none" strike="noStrike">
                 <a:solidFill>
                   <a:srgbClr val="64748B"/>
                 </a:solidFill>
@@ -5740,7 +5741,7 @@
               </a:defRPr>
             </a:pPr>
             <a:r>
-              <a:rPr sz="900" b="0" i="0" u="none" strike="noStrike">
+              <a:rPr lang="en-US" sz="900" b="0" i="0" u="none" strike="noStrike">
                 <a:solidFill>
                   <a:srgbClr val="64748B"/>
                 </a:solidFill>
@@ -6602,6 +6603,90 @@
 </p:notes>
 </file>
 
+<file path=ppt/notesSlides/notesSlide14.xml><?xml version="1.0" encoding="utf-8"?>
+<p:notes xmlns:a="http://schemas.openxmlformats.org/drawingml/2006/main" xmlns:r="http://schemas.openxmlformats.org/officeDocument/2006/relationships" xmlns:p="http://schemas.openxmlformats.org/presentationml/2006/main">
+  <p:cSld>
+    <p:spTree>
+      <p:nvGrpSpPr>
+        <p:cNvPr id="1" name=""/>
+        <p:cNvGrpSpPr/>
+        <p:nvPr/>
+      </p:nvGrpSpPr>
+      <p:grpSpPr>
+        <a:xfrm>
+          <a:off x="0" y="0"/>
+          <a:ext cx="0" cy="0"/>
+          <a:chOff x="0" y="0"/>
+          <a:chExt cx="0" cy="0"/>
+        </a:xfrm>
+      </p:grpSpPr>
+      <p:sp>
+        <p:nvSpPr>
+          <p:cNvPr id="2" name="Slide Image Placeholder 1"/>
+          <p:cNvSpPr>
+            <a:spLocks noGrp="1" noRot="1" noChangeAspect="1"/>
+          </p:cNvSpPr>
+          <p:nvPr>
+            <p:ph type="sldImg"/>
+          </p:nvPr>
+        </p:nvSpPr>
+        <p:spPr/>
+      </p:sp>
+      <p:sp>
+        <p:nvSpPr>
+          <p:cNvPr id="3" name="Notes Placeholder 2"/>
+          <p:cNvSpPr>
+            <a:spLocks noGrp="1"/>
+          </p:cNvSpPr>
+          <p:nvPr>
+            <p:ph type="body" idx="1"/>
+          </p:nvPr>
+        </p:nvSpPr>
+        <p:spPr/>
+        <p:txBody>
+          <a:bodyPr/>
+          <a:lstStyle/>
+          <a:p>
+            <a:endParaRPr lang="en-US" dirty="0"/>
+          </a:p>
+        </p:txBody>
+      </p:sp>
+      <p:sp>
+        <p:nvSpPr>
+          <p:cNvPr id="4" name="Slide Number Placeholder 3"/>
+          <p:cNvSpPr>
+            <a:spLocks noGrp="1"/>
+          </p:cNvSpPr>
+          <p:nvPr>
+            <p:ph type="sldNum" sz="quarter" idx="10"/>
+          </p:nvPr>
+        </p:nvSpPr>
+        <p:spPr/>
+        <p:txBody>
+          <a:bodyPr/>
+          <a:lstStyle/>
+          <a:p>
+            <a:fld id="{F7021451-1387-4CA6-816F-3879F97B5CBC}" type="slidenum">
+              <a:rPr lang="en-US"/>
+              <a:t>14</a:t>
+            </a:fld>
+            <a:endParaRPr lang="en-US"/>
+          </a:p>
+        </p:txBody>
+      </p:sp>
+    </p:spTree>
+    <p:extLst>
+      <p:ext uri="{BB962C8B-B14F-4D97-AF65-F5344CB8AC3E}">
+        <p14:creationId xmlns:p14="http://schemas.microsoft.com/office/powerpoint/2010/main" val="1024086991"/>
+      </p:ext>
+    </p:extLst>
+  </p:cSld>
+  <p:clrMapOvr>
+    <a:masterClrMapping/>
+  </p:clrMapOvr>
+</p:notes>
+</file>
+
 <file path=ppt/notesSlides/notesSlide2.xml><?xml version="1.0" encoding="utf-8"?>
 <p:notes xmlns:a="http://schemas.openxmlformats.org/drawingml/2006/main" xmlns:r="http://schemas.openxmlformats.org/officeDocument/2006/relationships" xmlns:p="http://schemas.openxmlformats.org/presentationml/2006/main">
   <p:cSld>
@@ -6859,7 +6944,13 @@
   <p:cSld>
     <p:spTree>
       <p:nvGrpSpPr>
-        <p:cNvPr id="1" name=""/>
+        <p:cNvPr id="1" name="">
+          <a:extLst>
+            <a:ext uri="{FF2B5EF4-FFF2-40B4-BE49-F238E27FC236}">
+              <a16:creationId xmlns:a16="http://schemas.microsoft.com/office/drawing/2014/main" id="{AA604113-700C-1C72-106E-0136ED59F22F}"/>
+            </a:ext>
+          </a:extLst>
+        </p:cNvPr>
         <p:cNvGrpSpPr/>
         <p:nvPr/>
       </p:nvGrpSpPr>
@@ -6873,7 +6964,13 @@
       </p:grpSpPr>
       <p:sp>
         <p:nvSpPr>
-          <p:cNvPr id="2" name="Slide Image Placeholder 1"/>
+          <p:cNvPr id="2" name="Slide Image Placeholder 1">
+            <a:extLst>
+              <a:ext uri="{FF2B5EF4-FFF2-40B4-BE49-F238E27FC236}">
+                <a16:creationId xmlns:a16="http://schemas.microsoft.com/office/drawing/2014/main" id="{79C92D45-6788-F63B-C277-83EA5379DB7F}"/>
+              </a:ext>
+            </a:extLst>
+          </p:cNvPr>
           <p:cNvSpPr>
             <a:spLocks noGrp="1" noRot="1" noChangeAspect="1"/>
           </p:cNvSpPr>
@@ -6885,7 +6982,13 @@
       </p:sp>
       <p:sp>
         <p:nvSpPr>
-          <p:cNvPr id="3" name="Notes Placeholder 2"/>
+          <p:cNvPr id="3" name="Notes Placeholder 2">
+            <a:extLst>
+              <a:ext uri="{FF2B5EF4-FFF2-40B4-BE49-F238E27FC236}">
+                <a16:creationId xmlns:a16="http://schemas.microsoft.com/office/drawing/2014/main" id="{723A90A5-5047-9430-76ED-9FACC79D21D4}"/>
+              </a:ext>
+            </a:extLst>
+          </p:cNvPr>
           <p:cNvSpPr>
             <a:spLocks noGrp="1"/>
           </p:cNvSpPr>
@@ -6904,7 +7007,13 @@
       </p:sp>
       <p:sp>
         <p:nvSpPr>
-          <p:cNvPr id="4" name="Slide Number Placeholder 3"/>
+          <p:cNvPr id="4" name="Slide Number Placeholder 3">
+            <a:extLst>
+              <a:ext uri="{FF2B5EF4-FFF2-40B4-BE49-F238E27FC236}">
+                <a16:creationId xmlns:a16="http://schemas.microsoft.com/office/drawing/2014/main" id="{F1F3E515-AA46-0564-2445-36F22D861CA5}"/>
+              </a:ext>
+            </a:extLst>
+          </p:cNvPr>
           <p:cNvSpPr>
             <a:spLocks noGrp="1"/>
           </p:cNvSpPr>
@@ -6928,7 +7037,7 @@
     </p:spTree>
     <p:extLst>
       <p:ext uri="{BB962C8B-B14F-4D97-AF65-F5344CB8AC3E}">
-        <p14:creationId xmlns:p14="http://schemas.microsoft.com/office/powerpoint/2010/main" val="1024086991"/>
+        <p14:creationId xmlns:p14="http://schemas.microsoft.com/office/powerpoint/2010/main" val="3644583945"/>
       </p:ext>
     </p:extLst>
   </p:cSld>
@@ -8175,6 +8284,133 @@
 
 <file path=ppt/slides/slide10.xml><?xml version="1.0" encoding="utf-8"?>
 <p:sld xmlns:a="http://schemas.openxmlformats.org/drawingml/2006/main" xmlns:r="http://schemas.openxmlformats.org/officeDocument/2006/relationships" xmlns:p="http://schemas.openxmlformats.org/presentationml/2006/main">
+  <p:cSld name="Slide 9">
+    <p:bg>
+      <p:bgPr>
+        <a:solidFill>
+          <a:srgbClr val="F7F9FC"/>
+        </a:solidFill>
+        <a:effectLst/>
+      </p:bgPr>
+    </p:bg>
+    <p:spTree>
+      <p:nvGrpSpPr>
+        <p:cNvPr id="1" name=""/>
+        <p:cNvGrpSpPr/>
+        <p:nvPr/>
+      </p:nvGrpSpPr>
+      <p:grpSpPr>
+        <a:xfrm>
+          <a:off x="0" y="0"/>
+          <a:ext cx="0" cy="0"/>
+          <a:chOff x="0" y="0"/>
+          <a:chExt cx="0" cy="0"/>
+        </a:xfrm>
+      </p:grpSpPr>
+      <p:sp>
+        <p:nvSpPr>
+          <p:cNvPr id="2" name="Text 0"/>
+          <p:cNvSpPr/>
+          <p:nvPr/>
+        </p:nvSpPr>
+        <p:spPr>
+          <a:xfrm>
+            <a:off x="502920" y="274320"/>
+            <a:ext cx="8138160" cy="502920"/>
+          </a:xfrm>
+          <a:prstGeom prst="rect">
+            <a:avLst/>
+          </a:prstGeom>
+          <a:noFill/>
+          <a:ln/>
+        </p:spPr>
+        <p:txBody>
+          <a:bodyPr wrap="square" rtlCol="0" anchor="ctr"/>
+          <a:lstStyle/>
+          <a:p>
+            <a:pPr marL="0" indent="0">
+              <a:buNone/>
+            </a:pPr>
+            <a:r>
+              <a:rPr lang="en-US" sz="2200" b="1" dirty="0">
+                <a:solidFill>
+                  <a:srgbClr val="1E293B"/>
+                </a:solidFill>
+                <a:latin typeface="Calibri" pitchFamily="34" charset="0"/>
+                <a:ea typeface="Calibri" pitchFamily="34" charset="-122"/>
+                <a:cs typeface="Calibri" pitchFamily="34" charset="-120"/>
+              </a:rPr>
+              <a:t>Feature Selection · Permutation Feature Importance (Random Forest, Validation Set)</a:t>
+            </a:r>
+            <a:endParaRPr lang="en-US" sz="2200" dirty="0"/>
+          </a:p>
+        </p:txBody>
+      </p:sp>
+      <p:graphicFrame>
+        <p:nvGraphicFramePr>
+          <p:cNvPr id="3" name="Chart 0"/>
+          <p:cNvGraphicFramePr/>
+          <p:nvPr/>
+        </p:nvGraphicFramePr>
+        <p:xfrm>
+          <a:off x="457200" y="868680"/>
+          <a:ext cx="8321040" cy="3840480"/>
+        </p:xfrm>
+        <a:graphic>
+          <a:graphicData uri="http://schemas.openxmlformats.org/drawingml/2006/chart">
+            <c:chart xmlns:c="http://schemas.openxmlformats.org/drawingml/2006/chart" xmlns:r="http://schemas.openxmlformats.org/officeDocument/2006/relationships" r:id="rId3"/>
+          </a:graphicData>
+        </a:graphic>
+      </p:graphicFrame>
+      <p:sp>
+        <p:nvSpPr>
+          <p:cNvPr id="4" name="Text 1"/>
+          <p:cNvSpPr/>
+          <p:nvPr/>
+        </p:nvSpPr>
+        <p:spPr>
+          <a:xfrm>
+            <a:off x="457200" y="4818888"/>
+            <a:ext cx="8321040" cy="201168"/>
+          </a:xfrm>
+          <a:prstGeom prst="rect">
+            <a:avLst/>
+          </a:prstGeom>
+          <a:noFill/>
+          <a:ln/>
+        </p:spPr>
+        <p:txBody>
+          <a:bodyPr wrap="square" rtlCol="0" anchor="ctr"/>
+          <a:lstStyle/>
+          <a:p>
+            <a:pPr marL="0" indent="0">
+              <a:buNone/>
+            </a:pPr>
+            <a:r>
+              <a:rPr lang="en-US" sz="900" b="1" dirty="0">
+                <a:solidFill>
+                  <a:srgbClr val="1E293B"/>
+                </a:solidFill>
+                <a:latin typeface="Calibri" pitchFamily="34" charset="0"/>
+                <a:ea typeface="Calibri" pitchFamily="34" charset="-122"/>
+                <a:cs typeface="Calibri" pitchFamily="34" charset="-120"/>
+              </a:rPr>
+              <a:t>log_funding_total_usd (0.057) + founded_year (0.053) + log_venture (0.052) are the three most impactful features</a:t>
+            </a:r>
+            <a:endParaRPr lang="en-US" sz="900" dirty="0"/>
+          </a:p>
+        </p:txBody>
+      </p:sp>
+    </p:spTree>
+  </p:cSld>
+  <p:clrMapOvr>
+    <a:masterClrMapping/>
+  </p:clrMapOvr>
+</p:sld>
+</file>
+
+<file path=ppt/slides/slide11.xml><?xml version="1.0" encoding="utf-8"?>
+<p:sld xmlns:a="http://schemas.openxmlformats.org/drawingml/2006/main" xmlns:r="http://schemas.openxmlformats.org/officeDocument/2006/relationships" xmlns:p="http://schemas.openxmlformats.org/presentationml/2006/main">
   <p:cSld name="Slide 10">
     <p:bg>
       <p:bgPr>
@@ -8325,7 +8561,7 @@
 </p:sld>
 </file>
 
-<file path=ppt/slides/slide11.xml><?xml version="1.0" encoding="utf-8"?>
+<file path=ppt/slides/slide12.xml><?xml version="1.0" encoding="utf-8"?>
 <p:sld xmlns:a="http://schemas.openxmlformats.org/drawingml/2006/main" xmlns:r="http://schemas.openxmlformats.org/officeDocument/2006/relationships" xmlns:p="http://schemas.openxmlformats.org/presentationml/2006/main">
   <p:cSld name="Slide 11">
     <p:bg>
@@ -8895,7 +9131,7 @@
 </p:sld>
 </file>
 
-<file path=ppt/slides/slide12.xml><?xml version="1.0" encoding="utf-8"?>
+<file path=ppt/slides/slide13.xml><?xml version="1.0" encoding="utf-8"?>
 <p:sld xmlns:a="http://schemas.openxmlformats.org/drawingml/2006/main" xmlns:r="http://schemas.openxmlformats.org/officeDocument/2006/relationships" xmlns:p="http://schemas.openxmlformats.org/presentationml/2006/main">
   <p:cSld name="Slide 12">
     <p:bg>
@@ -9039,7 +9275,7 @@
 </p:sld>
 </file>
 
-<file path=ppt/slides/slide13.xml><?xml version="1.0" encoding="utf-8"?>
+<file path=ppt/slides/slide14.xml><?xml version="1.0" encoding="utf-8"?>
 <p:sld xmlns:a="http://schemas.openxmlformats.org/drawingml/2006/main" xmlns:r="http://schemas.openxmlformats.org/officeDocument/2006/relationships" xmlns:p="http://schemas.openxmlformats.org/presentationml/2006/main">
   <p:cSld name="Slide 13">
     <p:bg>
@@ -9369,7 +9605,7 @@
 </p:sld>
 </file>
 
-<file path=ppt/slides/slide14.xml><?xml version="1.0" encoding="utf-8"?>
+<file path=ppt/slides/slide15.xml><?xml version="1.0" encoding="utf-8"?>
 <p:sld xmlns:a="http://schemas.openxmlformats.org/drawingml/2006/main" xmlns:r="http://schemas.openxmlformats.org/officeDocument/2006/relationships" xmlns:p="http://schemas.openxmlformats.org/presentationml/2006/main">
   <p:cSld>
     <p:spTree>
@@ -10813,6 +11049,180 @@
 
 <file path=ppt/slides/slide5.xml><?xml version="1.0" encoding="utf-8"?>
 <p:sld xmlns:a="http://schemas.openxmlformats.org/drawingml/2006/main" xmlns:r="http://schemas.openxmlformats.org/officeDocument/2006/relationships" xmlns:p="http://schemas.openxmlformats.org/presentationml/2006/main">
+  <p:cSld>
+    <p:bg>
+      <p:bgPr>
+        <a:solidFill>
+          <a:srgbClr val="F7F9FC"/>
+        </a:solidFill>
+        <a:effectLst/>
+      </p:bgPr>
+    </p:bg>
+    <p:spTree>
+      <p:nvGrpSpPr>
+        <p:cNvPr id="1" name="">
+          <a:extLst>
+            <a:ext uri="{FF2B5EF4-FFF2-40B4-BE49-F238E27FC236}">
+              <a16:creationId xmlns:a16="http://schemas.microsoft.com/office/drawing/2014/main" id="{E262AB6F-97A6-7BA6-E798-F9AC88D44141}"/>
+            </a:ext>
+          </a:extLst>
+        </p:cNvPr>
+        <p:cNvGrpSpPr/>
+        <p:nvPr/>
+      </p:nvGrpSpPr>
+      <p:grpSpPr>
+        <a:xfrm>
+          <a:off x="0" y="0"/>
+          <a:ext cx="0" cy="0"/>
+          <a:chOff x="0" y="0"/>
+          <a:chExt cx="0" cy="0"/>
+        </a:xfrm>
+      </p:grpSpPr>
+      <p:sp>
+        <p:nvSpPr>
+          <p:cNvPr id="2" name="Text 0">
+            <a:extLst>
+              <a:ext uri="{FF2B5EF4-FFF2-40B4-BE49-F238E27FC236}">
+                <a16:creationId xmlns:a16="http://schemas.microsoft.com/office/drawing/2014/main" id="{3DA3A6BE-561A-081F-B7A4-A3608BBC2DFB}"/>
+              </a:ext>
+            </a:extLst>
+          </p:cNvPr>
+          <p:cNvSpPr/>
+          <p:nvPr/>
+        </p:nvSpPr>
+        <p:spPr>
+          <a:xfrm>
+            <a:off x="502920" y="274320"/>
+            <a:ext cx="8138160" cy="502920"/>
+          </a:xfrm>
+          <a:prstGeom prst="rect">
+            <a:avLst/>
+          </a:prstGeom>
+          <a:noFill/>
+          <a:ln/>
+        </p:spPr>
+        <p:txBody>
+          <a:bodyPr wrap="square" rtlCol="0" anchor="ctr"/>
+          <a:lstStyle/>
+          <a:p>
+            <a:pPr marL="0" indent="0">
+              <a:buNone/>
+            </a:pPr>
+            <a:r>
+              <a:rPr lang="en-US" sz="2200" b="1" dirty="0">
+                <a:solidFill>
+                  <a:srgbClr val="1E293B"/>
+                </a:solidFill>
+                <a:latin typeface="Calibri" pitchFamily="34" charset="0"/>
+                <a:ea typeface="Calibri" pitchFamily="34" charset="-122"/>
+                <a:cs typeface="Calibri" pitchFamily="34" charset="-120"/>
+              </a:rPr>
+              <a:t>EDA · </a:t>
+            </a:r>
+            <a:r>
+              <a:rPr lang="he-IL" sz="2200" b="1" dirty="0" err="1">
+                <a:solidFill>
+                  <a:srgbClr val="1E293B"/>
+                </a:solidFill>
+                <a:latin typeface="Calibri" pitchFamily="34" charset="0"/>
+                <a:ea typeface="Calibri" pitchFamily="34" charset="-122"/>
+                <a:cs typeface="Calibri" pitchFamily="34" charset="-120"/>
+              </a:rPr>
+              <a:t>Status</a:t>
+            </a:r>
+            <a:r>
+              <a:rPr lang="he-IL" sz="2200" b="1" dirty="0">
+                <a:solidFill>
+                  <a:srgbClr val="1E293B"/>
+                </a:solidFill>
+                <a:latin typeface="Calibri" pitchFamily="34" charset="0"/>
+                <a:ea typeface="Calibri" pitchFamily="34" charset="-122"/>
+                <a:cs typeface="Calibri" pitchFamily="34" charset="-120"/>
+              </a:rPr>
+              <a:t> </a:t>
+            </a:r>
+            <a:r>
+              <a:rPr lang="he-IL" sz="2200" b="1" dirty="0" err="1">
+                <a:solidFill>
+                  <a:srgbClr val="1E293B"/>
+                </a:solidFill>
+                <a:latin typeface="Calibri" pitchFamily="34" charset="0"/>
+                <a:ea typeface="Calibri" pitchFamily="34" charset="-122"/>
+                <a:cs typeface="Calibri" pitchFamily="34" charset="-120"/>
+              </a:rPr>
+              <a:t>by</a:t>
+            </a:r>
+            <a:r>
+              <a:rPr lang="he-IL" sz="2200" b="1" dirty="0">
+                <a:solidFill>
+                  <a:srgbClr val="1E293B"/>
+                </a:solidFill>
+                <a:latin typeface="Calibri" pitchFamily="34" charset="0"/>
+                <a:ea typeface="Calibri" pitchFamily="34" charset="-122"/>
+                <a:cs typeface="Calibri" pitchFamily="34" charset="-120"/>
+              </a:rPr>
+              <a:t> </a:t>
+            </a:r>
+            <a:r>
+              <a:rPr lang="he-IL" sz="2200" b="1" dirty="0" err="1">
+                <a:solidFill>
+                  <a:srgbClr val="1E293B"/>
+                </a:solidFill>
+                <a:latin typeface="Calibri" pitchFamily="34" charset="0"/>
+                <a:ea typeface="Calibri" pitchFamily="34" charset="-122"/>
+                <a:cs typeface="Calibri" pitchFamily="34" charset="-120"/>
+              </a:rPr>
+              <a:t>Year</a:t>
+            </a:r>
+            <a:endParaRPr lang="en-US" sz="2200" dirty="0"/>
+          </a:p>
+        </p:txBody>
+      </p:sp>
+      <p:pic>
+        <p:nvPicPr>
+          <p:cNvPr id="9" name="Picture 8">
+            <a:extLst>
+              <a:ext uri="{FF2B5EF4-FFF2-40B4-BE49-F238E27FC236}">
+                <a16:creationId xmlns:a16="http://schemas.microsoft.com/office/drawing/2014/main" id="{0DC9F332-7EE0-5207-0187-240CC6806B0C}"/>
+              </a:ext>
+            </a:extLst>
+          </p:cNvPr>
+          <p:cNvPicPr>
+            <a:picLocks noChangeAspect="1"/>
+          </p:cNvPicPr>
+          <p:nvPr/>
+        </p:nvPicPr>
+        <p:blipFill>
+          <a:blip r:embed="rId3"/>
+          <a:stretch>
+            <a:fillRect/>
+          </a:stretch>
+        </p:blipFill>
+        <p:spPr>
+          <a:xfrm>
+            <a:off x="434339" y="1271624"/>
+            <a:ext cx="8138159" cy="3026056"/>
+          </a:xfrm>
+          <a:prstGeom prst="rect">
+            <a:avLst/>
+          </a:prstGeom>
+        </p:spPr>
+      </p:pic>
+    </p:spTree>
+    <p:extLst>
+      <p:ext uri="{BB962C8B-B14F-4D97-AF65-F5344CB8AC3E}">
+        <p14:creationId xmlns:p14="http://schemas.microsoft.com/office/powerpoint/2010/main" val="4265048845"/>
+      </p:ext>
+    </p:extLst>
+  </p:cSld>
+  <p:clrMapOvr>
+    <a:masterClrMapping/>
+  </p:clrMapOvr>
+</p:sld>
+</file>
+
+<file path=ppt/slides/slide6.xml><?xml version="1.0" encoding="utf-8"?>
+<p:sld xmlns:a="http://schemas.openxmlformats.org/drawingml/2006/main" xmlns:r="http://schemas.openxmlformats.org/officeDocument/2006/relationships" xmlns:p="http://schemas.openxmlformats.org/presentationml/2006/main">
   <p:cSld name="Slide 5">
     <p:bg>
       <p:bgPr>
@@ -10938,7 +11348,7 @@
 </p:sld>
 </file>
 
-<file path=ppt/slides/slide6.xml><?xml version="1.0" encoding="utf-8"?>
+<file path=ppt/slides/slide7.xml><?xml version="1.0" encoding="utf-8"?>
 <p:sld xmlns:a="http://schemas.openxmlformats.org/drawingml/2006/main" xmlns:r="http://schemas.openxmlformats.org/officeDocument/2006/relationships" xmlns:p="http://schemas.openxmlformats.org/presentationml/2006/main">
   <p:cSld name="Slide 6">
     <p:bg>
@@ -11237,7 +11647,7 @@
 </p:sld>
 </file>
 
-<file path=ppt/slides/slide7.xml><?xml version="1.0" encoding="utf-8"?>
+<file path=ppt/slides/slide8.xml><?xml version="1.0" encoding="utf-8"?>
 <p:sld xmlns:a="http://schemas.openxmlformats.org/drawingml/2006/main" xmlns:r="http://schemas.openxmlformats.org/officeDocument/2006/relationships" xmlns:p="http://schemas.openxmlformats.org/presentationml/2006/main">
   <p:cSld name="Slide 7">
     <p:bg>
@@ -11405,7 +11815,7 @@
 </p:sld>
 </file>
 
-<file path=ppt/slides/slide8.xml><?xml version="1.0" encoding="utf-8"?>
+<file path=ppt/slides/slide9.xml><?xml version="1.0" encoding="utf-8"?>
 <p:sld xmlns:a="http://schemas.openxmlformats.org/drawingml/2006/main" xmlns:r="http://schemas.openxmlformats.org/officeDocument/2006/relationships" xmlns:p="http://schemas.openxmlformats.org/presentationml/2006/main">
   <p:cSld name="Slide 8">
     <p:bg>
@@ -11519,133 +11929,6 @@
                 <a:cs typeface="Calibri" pitchFamily="34" charset="-120"/>
               </a:rPr>
               <a:t>All 32 features significant at α = 0.05 (p &lt; 0.05)</a:t>
-            </a:r>
-            <a:endParaRPr lang="en-US" sz="900" dirty="0"/>
-          </a:p>
-        </p:txBody>
-      </p:sp>
-    </p:spTree>
-  </p:cSld>
-  <p:clrMapOvr>
-    <a:masterClrMapping/>
-  </p:clrMapOvr>
-</p:sld>
-</file>
-
-<file path=ppt/slides/slide9.xml><?xml version="1.0" encoding="utf-8"?>
-<p:sld xmlns:a="http://schemas.openxmlformats.org/drawingml/2006/main" xmlns:r="http://schemas.openxmlformats.org/officeDocument/2006/relationships" xmlns:p="http://schemas.openxmlformats.org/presentationml/2006/main">
-  <p:cSld name="Slide 9">
-    <p:bg>
-      <p:bgPr>
-        <a:solidFill>
-          <a:srgbClr val="F7F9FC"/>
-        </a:solidFill>
-        <a:effectLst/>
-      </p:bgPr>
-    </p:bg>
-    <p:spTree>
-      <p:nvGrpSpPr>
-        <p:cNvPr id="1" name=""/>
-        <p:cNvGrpSpPr/>
-        <p:nvPr/>
-      </p:nvGrpSpPr>
-      <p:grpSpPr>
-        <a:xfrm>
-          <a:off x="0" y="0"/>
-          <a:ext cx="0" cy="0"/>
-          <a:chOff x="0" y="0"/>
-          <a:chExt cx="0" cy="0"/>
-        </a:xfrm>
-      </p:grpSpPr>
-      <p:sp>
-        <p:nvSpPr>
-          <p:cNvPr id="2" name="Text 0"/>
-          <p:cNvSpPr/>
-          <p:nvPr/>
-        </p:nvSpPr>
-        <p:spPr>
-          <a:xfrm>
-            <a:off x="502920" y="274320"/>
-            <a:ext cx="8138160" cy="502920"/>
-          </a:xfrm>
-          <a:prstGeom prst="rect">
-            <a:avLst/>
-          </a:prstGeom>
-          <a:noFill/>
-          <a:ln/>
-        </p:spPr>
-        <p:txBody>
-          <a:bodyPr wrap="square" rtlCol="0" anchor="ctr"/>
-          <a:lstStyle/>
-          <a:p>
-            <a:pPr marL="0" indent="0">
-              <a:buNone/>
-            </a:pPr>
-            <a:r>
-              <a:rPr lang="en-US" sz="2200" b="1" dirty="0">
-                <a:solidFill>
-                  <a:srgbClr val="1E293B"/>
-                </a:solidFill>
-                <a:latin typeface="Calibri" pitchFamily="34" charset="0"/>
-                <a:ea typeface="Calibri" pitchFamily="34" charset="-122"/>
-                <a:cs typeface="Calibri" pitchFamily="34" charset="-120"/>
-              </a:rPr>
-              <a:t>Feature Selection · Permutation Feature Importance (Random Forest, Validation Set)</a:t>
-            </a:r>
-            <a:endParaRPr lang="en-US" sz="2200" dirty="0"/>
-          </a:p>
-        </p:txBody>
-      </p:sp>
-      <p:graphicFrame>
-        <p:nvGraphicFramePr>
-          <p:cNvPr id="3" name="Chart 0"/>
-          <p:cNvGraphicFramePr/>
-          <p:nvPr/>
-        </p:nvGraphicFramePr>
-        <p:xfrm>
-          <a:off x="457200" y="868680"/>
-          <a:ext cx="8321040" cy="3840480"/>
-        </p:xfrm>
-        <a:graphic>
-          <a:graphicData uri="http://schemas.openxmlformats.org/drawingml/2006/chart">
-            <c:chart xmlns:c="http://schemas.openxmlformats.org/drawingml/2006/chart" xmlns:r="http://schemas.openxmlformats.org/officeDocument/2006/relationships" r:id="rId3"/>
-          </a:graphicData>
-        </a:graphic>
-      </p:graphicFrame>
-      <p:sp>
-        <p:nvSpPr>
-          <p:cNvPr id="4" name="Text 1"/>
-          <p:cNvSpPr/>
-          <p:nvPr/>
-        </p:nvSpPr>
-        <p:spPr>
-          <a:xfrm>
-            <a:off x="457200" y="4818888"/>
-            <a:ext cx="8321040" cy="201168"/>
-          </a:xfrm>
-          <a:prstGeom prst="rect">
-            <a:avLst/>
-          </a:prstGeom>
-          <a:noFill/>
-          <a:ln/>
-        </p:spPr>
-        <p:txBody>
-          <a:bodyPr wrap="square" rtlCol="0" anchor="ctr"/>
-          <a:lstStyle/>
-          <a:p>
-            <a:pPr marL="0" indent="0">
-              <a:buNone/>
-            </a:pPr>
-            <a:r>
-              <a:rPr lang="en-US" sz="900" b="1" dirty="0">
-                <a:solidFill>
-                  <a:srgbClr val="1E293B"/>
-                </a:solidFill>
-                <a:latin typeface="Calibri" pitchFamily="34" charset="0"/>
-                <a:ea typeface="Calibri" pitchFamily="34" charset="-122"/>
-                <a:cs typeface="Calibri" pitchFamily="34" charset="-120"/>
-              </a:rPr>
-              <a:t>log_funding_total_usd (0.057) + founded_year (0.053) + log_venture (0.052) are the three most impactful features</a:t>
             </a:r>
             <a:endParaRPr lang="en-US" sz="900" dirty="0"/>
           </a:p>
